--- a/docs/demos/presentacion/ExamLab-Presentacion-General.pptx
+++ b/docs/demos/presentacion/ExamLab-Presentacion-General.pptx
@@ -3390,7 +3390,7 @@
                 <a:ea typeface="Calibri" pitchFamily="34" charset="-122"/>
                 <a:cs typeface="Calibri" pitchFamily="34" charset="-120"/>
               </a:rPr>
-              <a:t>Archivos de proyecto, preguntas de banco y juegos Kahoot, generados automáticamente.</a:t>
+              <a:t>Archivos de proyecto, preguntas de banco y juegos Reto en vivo, generados automáticamente.</a:t>
             </a:r>
             <a:endParaRPr lang="en-US" sz="1600" dirty="0"/>
           </a:p>
@@ -4855,7 +4855,7 @@
                 <a:ea typeface="Calibri" pitchFamily="34" charset="-122"/>
                 <a:cs typeface="Calibri" pitchFamily="34" charset="-120"/>
               </a:rPr>
-              <a:t>Encuestas tipo Doodle (cupos) y Kahoot en vivo con ranking en tiempo real.</a:t>
+              <a:t>Encuestas tipo Doodle (cupos) y Reto en vivo con ranking en tiempo real.</a:t>
             </a:r>
             <a:endParaRPr lang="en-US" sz="1600" dirty="0"/>
           </a:p>

--- a/docs/demos/presentacion/ExamLab-Presentacion-General.pptx
+++ b/docs/demos/presentacion/ExamLab-Presentacion-General.pptx
@@ -1606,6 +1606,10 @@
           </a:solidFill>
           <a:ln/>
         </p:spPr>
+        <p:txBody>
+          <a:bodyPr/>
+          <a:p/>
+        </p:txBody>
       </p:sp>
       <p:sp>
         <p:nvSpPr>
@@ -1626,6 +1630,10 @@
           </a:solidFill>
           <a:ln/>
         </p:spPr>
+        <p:txBody>
+          <a:bodyPr/>
+          <a:p/>
+        </p:txBody>
       </p:sp>
       <p:sp>
         <p:nvSpPr>
@@ -1870,6 +1878,10 @@
           </a:solidFill>
           <a:ln/>
         </p:spPr>
+        <p:txBody>
+          <a:bodyPr/>
+          <a:p/>
+        </p:txBody>
       </p:sp>
       <p:sp>
         <p:nvSpPr>
@@ -1890,6 +1902,10 @@
           </a:solidFill>
           <a:ln/>
         </p:spPr>
+        <p:txBody>
+          <a:bodyPr/>
+          <a:p/>
+        </p:txBody>
       </p:sp>
       <p:sp>
         <p:nvSpPr>
@@ -2033,7 +2049,7 @@
                 <a:ea typeface="Calibri" pitchFamily="34" charset="-122"/>
                 <a:cs typeface="Calibri" pitchFamily="34" charset="-120"/>
               </a:rPr>
-              <a:t>Multi-institución (multi-tenant) con marca, branding y datos aislados por institución.</a:t>
+              <a:t>Multi-institución con marca, branding y datos aislados por institución.</a:t>
             </a:r>
             <a:endParaRPr lang="en-US" sz="1600" dirty="0"/>
           </a:p>
@@ -2137,6 +2153,10 @@
             <a:prstDash val="solid"/>
           </a:ln>
         </p:spPr>
+        <p:txBody>
+          <a:bodyPr/>
+          <a:p/>
+        </p:txBody>
       </p:sp>
       <p:sp>
         <p:nvSpPr>
@@ -2210,6 +2230,10 @@
           </a:solidFill>
           <a:ln/>
         </p:spPr>
+        <p:txBody>
+          <a:bodyPr/>
+          <a:p/>
+        </p:txBody>
       </p:sp>
       <p:sp>
         <p:nvSpPr>
@@ -2337,6 +2361,10 @@
           </a:solidFill>
           <a:ln/>
         </p:spPr>
+        <p:txBody>
+          <a:bodyPr/>
+          <a:p/>
+        </p:txBody>
       </p:sp>
       <p:sp>
         <p:nvSpPr>
@@ -2446,6 +2474,10 @@
             </a:outerShdw>
           </a:effectLst>
         </p:spPr>
+        <p:txBody>
+          <a:bodyPr/>
+          <a:p/>
+        </p:txBody>
       </p:sp>
       <p:sp>
         <p:nvSpPr>
@@ -2594,6 +2626,10 @@
             </a:outerShdw>
           </a:effectLst>
         </p:spPr>
+        <p:txBody>
+          <a:bodyPr/>
+          <a:p/>
+        </p:txBody>
       </p:sp>
       <p:sp>
         <p:nvSpPr>
@@ -2742,6 +2778,10 @@
             </a:outerShdw>
           </a:effectLst>
         </p:spPr>
+        <p:txBody>
+          <a:bodyPr/>
+          <a:p/>
+        </p:txBody>
       </p:sp>
       <p:sp>
         <p:nvSpPr>
@@ -2890,6 +2930,10 @@
             </a:outerShdw>
           </a:effectLst>
         </p:spPr>
+        <p:txBody>
+          <a:bodyPr/>
+          <a:p/>
+        </p:txBody>
       </p:sp>
       <p:sp>
         <p:nvSpPr>
@@ -3060,6 +3104,10 @@
           </a:solidFill>
           <a:ln/>
         </p:spPr>
+        <p:txBody>
+          <a:bodyPr/>
+          <a:p/>
+        </p:txBody>
       </p:sp>
       <p:sp>
         <p:nvSpPr>
@@ -3187,6 +3235,10 @@
           </a:solidFill>
           <a:ln/>
         </p:spPr>
+        <p:txBody>
+          <a:bodyPr/>
+          <a:p/>
+        </p:txBody>
       </p:sp>
       <p:sp>
         <p:nvSpPr>
@@ -3207,6 +3259,10 @@
           </a:solidFill>
           <a:ln/>
         </p:spPr>
+        <p:txBody>
+          <a:bodyPr/>
+          <a:p/>
+        </p:txBody>
       </p:sp>
       <p:sp>
         <p:nvSpPr>
@@ -3494,6 +3550,10 @@
             <a:prstDash val="solid"/>
           </a:ln>
         </p:spPr>
+        <p:txBody>
+          <a:bodyPr/>
+          <a:p/>
+        </p:txBody>
       </p:sp>
       <p:sp>
         <p:nvSpPr>
@@ -3567,6 +3627,10 @@
           </a:solidFill>
           <a:ln/>
         </p:spPr>
+        <p:txBody>
+          <a:bodyPr/>
+          <a:p/>
+        </p:txBody>
       </p:sp>
       <p:sp>
         <p:nvSpPr>
@@ -3694,6 +3758,10 @@
           </a:solidFill>
           <a:ln/>
         </p:spPr>
+        <p:txBody>
+          <a:bodyPr/>
+          <a:p/>
+        </p:txBody>
       </p:sp>
       <p:sp>
         <p:nvSpPr>
@@ -3714,6 +3782,10 @@
           </a:solidFill>
           <a:ln/>
         </p:spPr>
+        <p:txBody>
+          <a:bodyPr/>
+          <a:p/>
+        </p:txBody>
       </p:sp>
       <p:sp>
         <p:nvSpPr>
@@ -4001,6 +4073,10 @@
             <a:prstDash val="solid"/>
           </a:ln>
         </p:spPr>
+        <p:txBody>
+          <a:bodyPr/>
+          <a:p/>
+        </p:txBody>
       </p:sp>
       <p:sp>
         <p:nvSpPr>
@@ -4074,6 +4150,10 @@
           </a:solidFill>
           <a:ln/>
         </p:spPr>
+        <p:txBody>
+          <a:bodyPr/>
+          <a:p/>
+        </p:txBody>
       </p:sp>
       <p:sp>
         <p:nvSpPr>
@@ -4201,6 +4281,10 @@
           </a:solidFill>
           <a:ln/>
         </p:spPr>
+        <p:txBody>
+          <a:bodyPr/>
+          <a:p/>
+        </p:txBody>
       </p:sp>
       <p:sp>
         <p:nvSpPr>
@@ -4221,6 +4305,10 @@
           </a:solidFill>
           <a:ln/>
         </p:spPr>
+        <p:txBody>
+          <a:bodyPr/>
+          <a:p/>
+        </p:txBody>
       </p:sp>
       <p:sp>
         <p:nvSpPr>
@@ -4468,6 +4556,10 @@
             <a:prstDash val="solid"/>
           </a:ln>
         </p:spPr>
+        <p:txBody>
+          <a:bodyPr/>
+          <a:p/>
+        </p:txBody>
       </p:sp>
       <p:sp>
         <p:nvSpPr>
@@ -4541,6 +4633,10 @@
           </a:solidFill>
           <a:ln/>
         </p:spPr>
+        <p:txBody>
+          <a:bodyPr/>
+          <a:p/>
+        </p:txBody>
       </p:sp>
       <p:sp>
         <p:nvSpPr>
@@ -4668,6 +4764,10 @@
           </a:solidFill>
           <a:ln/>
         </p:spPr>
+        <p:txBody>
+          <a:bodyPr/>
+          <a:p/>
+        </p:txBody>
       </p:sp>
       <p:sp>
         <p:nvSpPr>
@@ -4688,6 +4788,10 @@
           </a:solidFill>
           <a:ln/>
         </p:spPr>
+        <p:txBody>
+          <a:bodyPr/>
+          <a:p/>
+        </p:txBody>
       </p:sp>
       <p:sp>
         <p:nvSpPr>
@@ -4928,6 +5032,10 @@
           </a:solidFill>
           <a:ln/>
         </p:spPr>
+        <p:txBody>
+          <a:bodyPr/>
+          <a:p/>
+        </p:txBody>
       </p:sp>
       <p:sp>
         <p:nvSpPr>
@@ -5055,6 +5163,10 @@
           </a:solidFill>
           <a:ln/>
         </p:spPr>
+        <p:txBody>
+          <a:bodyPr/>
+          <a:p/>
+        </p:txBody>
       </p:sp>
       <p:sp>
         <p:nvSpPr>
@@ -5075,6 +5187,10 @@
           </a:solidFill>
           <a:ln/>
         </p:spPr>
+        <p:txBody>
+          <a:bodyPr/>
+          <a:p/>
+        </p:txBody>
       </p:sp>
       <p:sp>
         <p:nvSpPr>
@@ -5322,6 +5438,10 @@
             <a:prstDash val="solid"/>
           </a:ln>
         </p:spPr>
+        <p:txBody>
+          <a:bodyPr/>
+          <a:p/>
+        </p:txBody>
       </p:sp>
       <p:sp>
         <p:nvSpPr>
@@ -5395,6 +5515,10 @@
           </a:solidFill>
           <a:ln/>
         </p:spPr>
+        <p:txBody>
+          <a:bodyPr/>
+          <a:p/>
+        </p:txBody>
       </p:sp>
       <p:sp>
         <p:nvSpPr>
@@ -5522,6 +5646,10 @@
           </a:solidFill>
           <a:ln/>
         </p:spPr>
+        <p:txBody>
+          <a:bodyPr/>
+          <a:p/>
+        </p:txBody>
       </p:sp>
       <p:sp>
         <p:nvSpPr>
